--- a/docs/presentatie.pptx
+++ b/docs/presentatie.pptx
@@ -1577,7 +1577,7 @@
           <a:lstStyle/>
           <a:p>
             <a:r>
-              <a:t>Betrouwbaar: 373 tests, ook in GitHub Actions. Verantwoord: geen persoonsgegevens van verzekerden. En generatieve AI: ik heb Claude als ontwikkelassistent gebruikt; zeven keer bleek iets niet te kloppen, zoals een CI-test die als gedaan was afgevinkt maar nooit had gedraaid. Daarom is alles getest en gemeten. Deze slide kan vervallen bij een korter tijdslot. (~1 min)</a:t>
+              <a:t>Betrouwbaar: 383 tests, ook in GitHub Actions. Verantwoord: geen persoonsgegevens van verzekerden. En generatieve AI: ik heb Claude als ontwikkelassistent gebruikt; zeven keer bleek iets niet te kloppen, zoals een CI-test die als gedaan was afgevinkt maar nooit had gedraaid. Daarom is alles getest en gemeten. Deze slide kan vervallen bij een korter tijdslot. (~1 min)</a:t>
             </a:r>
           </a:p>
         </p:txBody>
@@ -10037,7 +10037,7 @@
                 </a:solidFill>
                 <a:latin typeface="Calibri"/>
               </a:rPr>
-              <a:t>373</a:t>
+              <a:t>383</a:t>
             </a:r>
           </a:p>
         </p:txBody>

--- a/docs/presentatie.pptx
+++ b/docs/presentatie.pptx
@@ -1017,7 +1017,7 @@
           <a:lstStyle/>
           <a:p>
             <a:r>
-              <a:t>Conclusie: sector en grootte gaan duidelijk samen met verzuim, en het platform maakt dat herhaalbaar en herleidbaar zonder privacyrisico. Mijn advies: gebruik het naast de eigen cijfers en op groepsniveau, bevestig trends met definitieve cijfers, laat compliance meekijken, en koppel pas na een DPIA. Vragen? (~1 min)</a:t>
+              <a:t>Conclusie: sector en grootte gaan duidelijk samen met verzuim, en het platform maakt dat herhaalbaar en herleidbaar zonder privacyrisico. Mijn advies: gebruik het naast de eigen cijfers en op groepsniveau, lees een trend niet als voorspelling, laat compliance meekijken, en koppel pas na een DPIA. Vragen? (~1 min)</a:t>
             </a:r>
           </a:p>
         </p:txBody>
@@ -1437,7 +1437,7 @@
           <a:lstStyle/>
           <a:p>
             <a:r>
-              <a:t>De enquête laat zien waaróm: in de zorg verzuimen meer mensen, langer, en vaker door het werk, vooral besmetting en emotioneel zwaar werk. Maar 42 van de 65 maten liggen binnen de foutmarge, en het blijft samenhang: de cijfers zeggen niets over één werkgever. Ook het trendsignaal is gevoelig: met alleen definitieve cijfers stijgt een andere sector. (~1,5 min)</a:t>
+              <a:t>De enquête laat zien waaróm: in de zorg verzuimen meer mensen, langer, en vaker door het werk, vooral besmetting en emotioneel zwaar werk. Maar 42 van de 65 maten liggen binnen de foutmarge, en het blijft samenhang: de cijfers zeggen niets over één werkgever. En een terugtoets op de historie laat zien: een oordeel hoger of lager houdt een jaar later stand, maar een trend voorspelt niet; met alleen definitieve cijfers stijgt zelfs een andere sector. (~1,5 min)</a:t>
             </a:r>
           </a:p>
         </p:txBody>
@@ -1577,7 +1577,7 @@
           <a:lstStyle/>
           <a:p>
             <a:r>
-              <a:t>Betrouwbaar: 383 tests, ook in GitHub Actions. Verantwoord: geen persoonsgegevens van verzekerden. En generatieve AI: ik heb Claude als ontwikkelassistent gebruikt; zeven keer bleek iets niet te kloppen, zoals een CI-test die als gedaan was afgevinkt maar nooit had gedraaid. Daarom is alles getest en gemeten. Deze slide kan vervallen bij een korter tijdslot. (~1 min)</a:t>
+              <a:t>Betrouwbaar: 388 tests, ook in GitHub Actions. Verantwoord: geen persoonsgegevens van verzekerden. En generatieve AI: ik heb Claude als ontwikkelassistent gebruikt; acht keer bleek iets niet te kloppen, zoals een CI-test die als gedaan was afgevinkt maar nooit had gedraaid, en een verborgen koppelfout die pas een tweede review vond. Daarom is alles getest en gemeten. Deze slide kan vervallen bij een korter tijdslot. (~1 min)</a:t>
             </a:r>
           </a:p>
         </p:txBody>
@@ -4982,7 +4982,7 @@
                 </a:solidFill>
                 <a:latin typeface="Calibri"/>
               </a:rPr>
-              <a:t>Bevestig trends met definitieve cijfers</a:t>
+              <a:t>Lees een trend niet als voorspelling</a:t>
             </a:r>
           </a:p>
           <a:p>
@@ -10037,7 +10037,7 @@
                 </a:solidFill>
                 <a:latin typeface="Calibri"/>
               </a:rPr>
-              <a:t>383</a:t>
+              <a:t>388</a:t>
             </a:r>
           </a:p>
         </p:txBody>
@@ -10339,7 +10339,7 @@
                 </a:solidFill>
                 <a:latin typeface="Calibri"/>
               </a:rPr>
-              <a:t>7</a:t>
+              <a:t>8</a:t>
             </a:r>
           </a:p>
         </p:txBody>

--- a/docs/presentatie.pptx
+++ b/docs/presentatie.pptx
@@ -1577,7 +1577,7 @@
           <a:lstStyle/>
           <a:p>
             <a:r>
-              <a:t>Betrouwbaar: 388 tests, ook in GitHub Actions. Verantwoord: geen persoonsgegevens van verzekerden. En generatieve AI: ik heb Claude als ontwikkelassistent gebruikt; acht keer bleek iets niet te kloppen, zoals een CI-test die als gedaan was afgevinkt maar nooit had gedraaid, en een verborgen koppelfout die pas een tweede review vond. Daarom is alles getest en gemeten. Deze slide kan vervallen bij een korter tijdslot. (~1 min)</a:t>
+              <a:t>Betrouwbaar: 395 tests, ook in GitHub Actions. Verantwoord: geen persoonsgegevens van verzekerden. En generatieve AI: ik heb Claude als ontwikkelassistent gebruikt; acht keer bleek iets niet te kloppen, zoals een CI-test die als gedaan was afgevinkt maar nooit had gedraaid, en een verborgen koppelfout die pas een tweede review vond. Daarom is alles getest en gemeten. Deze slide kan vervallen bij een korter tijdslot. (~1 min)</a:t>
             </a:r>
           </a:p>
         </p:txBody>
@@ -10037,7 +10037,7 @@
                 </a:solidFill>
                 <a:latin typeface="Calibri"/>
               </a:rPr>
-              <a:t>388</a:t>
+              <a:t>395</a:t>
             </a:r>
           </a:p>
         </p:txBody>

--- a/docs/presentatie.pptx
+++ b/docs/presentatie.pptx
@@ -1577,7 +1577,7 @@
           <a:lstStyle/>
           <a:p>
             <a:r>
-              <a:t>Betrouwbaar: 395 tests, ook in GitHub Actions. Verantwoord: geen persoonsgegevens van verzekerden. En generatieve AI: ik heb Claude als ontwikkelassistent gebruikt; acht keer bleek iets niet te kloppen, zoals een CI-test die als gedaan was afgevinkt maar nooit had gedraaid, en een verborgen koppelfout die pas een tweede review vond. Daarom is alles getest en gemeten. Deze slide kan vervallen bij een korter tijdslot. (~1 min)</a:t>
+              <a:t>Betrouwbaar: 396 tests, ook in GitHub Actions. Verantwoord: geen persoonsgegevens van verzekerden. En generatieve AI: ik heb Claude als ontwikkelassistent gebruikt; acht keer bleek iets niet te kloppen, zoals een CI-test die als gedaan was afgevinkt maar nooit had gedraaid, en een verborgen koppelfout die pas een tweede review vond. Daarom is alles getest en gemeten. Deze slide kan vervallen bij een korter tijdslot. (~1 min)</a:t>
             </a:r>
           </a:p>
         </p:txBody>
@@ -10037,7 +10037,7 @@
                 </a:solidFill>
                 <a:latin typeface="Calibri"/>
               </a:rPr>
-              <a:t>395</a:t>
+              <a:t>396</a:t>
             </a:r>
           </a:p>
         </p:txBody>

--- a/docs/presentatie.pptx
+++ b/docs/presentatie.pptx
@@ -1577,7 +1577,7 @@
           <a:lstStyle/>
           <a:p>
             <a:r>
-              <a:t>Betrouwbaar: 396 tests, ook in GitHub Actions. Verantwoord: geen persoonsgegevens van verzekerden. En generatieve AI: ik heb Claude als ontwikkelassistent gebruikt; acht keer bleek iets niet te kloppen, zoals een CI-test die als gedaan was afgevinkt maar nooit had gedraaid, en een verborgen koppelfout die pas een tweede review vond. Daarom is alles getest en gemeten. Deze slide kan vervallen bij een korter tijdslot. (~1 min)</a:t>
+              <a:t>Betrouwbaar: 397 tests, ook in GitHub Actions. Verantwoord: geen persoonsgegevens van verzekerden. En generatieve AI: ik heb Claude als ontwikkelassistent gebruikt; acht keer bleek iets niet te kloppen, zoals een CI-test die als gedaan was afgevinkt maar nooit had gedraaid, en een verborgen koppelfout die pas een tweede review vond. Daarom is alles getest en gemeten. Deze slide kan vervallen bij een korter tijdslot. (~1 min)</a:t>
             </a:r>
           </a:p>
         </p:txBody>
@@ -10037,7 +10037,7 @@
                 </a:solidFill>
                 <a:latin typeface="Calibri"/>
               </a:rPr>
-              <a:t>396</a:t>
+              <a:t>397</a:t>
             </a:r>
           </a:p>
         </p:txBody>
